--- a/outputs/produkte/mama-ceo/03-praesentationen/saeule-5/01-lektion-5-1.pptx
+++ b/outputs/produkte/mama-ceo/03-praesentationen/saeule-5/01-lektion-5-1.pptx
@@ -3998,6 +3998,14 @@
 <file path=ppt/slides/slide1.xml><?xml version="1.0" encoding="utf-8"?>
 <p:sld xmlns:a="http://schemas.openxmlformats.org/drawingml/2006/main" xmlns:p="http://schemas.openxmlformats.org/presentationml/2006/main" xmlns:r="http://schemas.openxmlformats.org/officeDocument/2006/relationships">
   <p:cSld>
+    <p:bg>
+      <p:bgPr>
+        <a:solidFill>
+          <a:srgbClr val="F1ECDD"/>
+        </a:solidFill>
+        <a:effectLst/>
+      </p:bgPr>
+    </p:bg>
     <p:spTree>
       <p:nvGrpSpPr>
         <p:cNvPr id="1" name=""/>
@@ -4273,6 +4281,14 @@
 <file path=ppt/slides/slide2.xml><?xml version="1.0" encoding="utf-8"?>
 <p:sld xmlns:a="http://schemas.openxmlformats.org/drawingml/2006/main" xmlns:p="http://schemas.openxmlformats.org/presentationml/2006/main" xmlns:r="http://schemas.openxmlformats.org/officeDocument/2006/relationships">
   <p:cSld>
+    <p:bg>
+      <p:bgPr>
+        <a:solidFill>
+          <a:srgbClr val="F1ECDD"/>
+        </a:solidFill>
+        <a:effectLst/>
+      </p:bgPr>
+    </p:bg>
     <p:spTree>
       <p:nvGrpSpPr>
         <p:cNvPr id="1" name=""/>
@@ -4348,7 +4364,7 @@
                 </a:solidFill>
                 <a:latin typeface="Calibri"/>
               </a:rPr>
-              <a:t>▸  </a:t>
+              <a:t>✓  </a:t>
             </a:r>
             <a:r>
               <a:rPr sz="1600" b="0">
@@ -4373,7 +4389,7 @@
                 </a:solidFill>
                 <a:latin typeface="Calibri"/>
               </a:rPr>
-              <a:t>▸  </a:t>
+              <a:t>✓  </a:t>
             </a:r>
             <a:r>
               <a:rPr sz="1600" b="0">
@@ -4398,7 +4414,7 @@
                 </a:solidFill>
                 <a:latin typeface="Calibri"/>
               </a:rPr>
-              <a:t>▸  </a:t>
+              <a:t>✓  </a:t>
             </a:r>
             <a:r>
               <a:rPr sz="1600" b="0">
@@ -4423,7 +4439,7 @@
                 </a:solidFill>
                 <a:latin typeface="Calibri"/>
               </a:rPr>
-              <a:t>▸  </a:t>
+              <a:t>✓  </a:t>
             </a:r>
             <a:r>
               <a:rPr sz="1600" b="0">
@@ -4517,6 +4533,14 @@
 <file path=ppt/slides/slide3.xml><?xml version="1.0" encoding="utf-8"?>
 <p:sld xmlns:a="http://schemas.openxmlformats.org/drawingml/2006/main" xmlns:p="http://schemas.openxmlformats.org/presentationml/2006/main" xmlns:r="http://schemas.openxmlformats.org/officeDocument/2006/relationships">
   <p:cSld>
+    <p:bg>
+      <p:bgPr>
+        <a:solidFill>
+          <a:srgbClr val="F1ECDD"/>
+        </a:solidFill>
+        <a:effectLst/>
+      </p:bgPr>
+    </p:bg>
     <p:spTree>
       <p:nvGrpSpPr>
         <p:cNvPr id="1" name=""/>
@@ -4592,7 +4616,7 @@
                 </a:solidFill>
                 <a:latin typeface="Calibri"/>
               </a:rPr>
-              <a:t>▸  </a:t>
+              <a:t>✓  </a:t>
             </a:r>
             <a:r>
               <a:rPr sz="1600" b="0">
@@ -4617,7 +4641,7 @@
                 </a:solidFill>
                 <a:latin typeface="Calibri"/>
               </a:rPr>
-              <a:t>▸  </a:t>
+              <a:t>✓  </a:t>
             </a:r>
             <a:r>
               <a:rPr sz="1600" b="0">
@@ -4642,7 +4666,7 @@
                 </a:solidFill>
                 <a:latin typeface="Calibri"/>
               </a:rPr>
-              <a:t>▸  </a:t>
+              <a:t>✓  </a:t>
             </a:r>
             <a:r>
               <a:rPr sz="1600" b="0">
@@ -4736,6 +4760,14 @@
 <file path=ppt/slides/slide4.xml><?xml version="1.0" encoding="utf-8"?>
 <p:sld xmlns:a="http://schemas.openxmlformats.org/drawingml/2006/main" xmlns:p="http://schemas.openxmlformats.org/presentationml/2006/main" xmlns:r="http://schemas.openxmlformats.org/officeDocument/2006/relationships">
   <p:cSld>
+    <p:bg>
+      <p:bgPr>
+        <a:solidFill>
+          <a:srgbClr val="F1ECDD"/>
+        </a:solidFill>
+        <a:effectLst/>
+      </p:bgPr>
+    </p:bg>
     <p:spTree>
       <p:nvGrpSpPr>
         <p:cNvPr id="1" name=""/>
@@ -4811,7 +4843,7 @@
                 </a:solidFill>
                 <a:latin typeface="Calibri"/>
               </a:rPr>
-              <a:t>▸  </a:t>
+              <a:t>✓  </a:t>
             </a:r>
             <a:r>
               <a:rPr sz="1600" b="0">
@@ -4836,7 +4868,7 @@
                 </a:solidFill>
                 <a:latin typeface="Calibri"/>
               </a:rPr>
-              <a:t>▸  </a:t>
+              <a:t>✓  </a:t>
             </a:r>
             <a:r>
               <a:rPr sz="1600" b="0">
@@ -4861,7 +4893,7 @@
                 </a:solidFill>
                 <a:latin typeface="Calibri"/>
               </a:rPr>
-              <a:t>▸  </a:t>
+              <a:t>✓  </a:t>
             </a:r>
             <a:r>
               <a:rPr sz="1600" b="0">
@@ -4886,7 +4918,7 @@
                 </a:solidFill>
                 <a:latin typeface="Calibri"/>
               </a:rPr>
-              <a:t>▸  </a:t>
+              <a:t>✓  </a:t>
             </a:r>
             <a:r>
               <a:rPr sz="1600" b="0">
@@ -4980,6 +5012,14 @@
 <file path=ppt/slides/slide5.xml><?xml version="1.0" encoding="utf-8"?>
 <p:sld xmlns:a="http://schemas.openxmlformats.org/drawingml/2006/main" xmlns:p="http://schemas.openxmlformats.org/presentationml/2006/main" xmlns:r="http://schemas.openxmlformats.org/officeDocument/2006/relationships">
   <p:cSld>
+    <p:bg>
+      <p:bgPr>
+        <a:solidFill>
+          <a:srgbClr val="F1ECDD"/>
+        </a:solidFill>
+        <a:effectLst/>
+      </p:bgPr>
+    </p:bg>
     <p:spTree>
       <p:nvGrpSpPr>
         <p:cNvPr id="1" name=""/>
@@ -5055,7 +5095,7 @@
                 </a:solidFill>
                 <a:latin typeface="Calibri"/>
               </a:rPr>
-              <a:t>▸  </a:t>
+              <a:t>✓  </a:t>
             </a:r>
             <a:r>
               <a:rPr sz="1600" b="0">
@@ -5080,7 +5120,7 @@
                 </a:solidFill>
                 <a:latin typeface="Calibri"/>
               </a:rPr>
-              <a:t>▸  </a:t>
+              <a:t>✓  </a:t>
             </a:r>
             <a:r>
               <a:rPr sz="1600" b="0">
@@ -5105,7 +5145,7 @@
                 </a:solidFill>
                 <a:latin typeface="Calibri"/>
               </a:rPr>
-              <a:t>▸  </a:t>
+              <a:t>✓  </a:t>
             </a:r>
             <a:r>
               <a:rPr sz="1600" b="0">
@@ -5199,6 +5239,14 @@
 <file path=ppt/slides/slide6.xml><?xml version="1.0" encoding="utf-8"?>
 <p:sld xmlns:a="http://schemas.openxmlformats.org/drawingml/2006/main" xmlns:p="http://schemas.openxmlformats.org/presentationml/2006/main" xmlns:r="http://schemas.openxmlformats.org/officeDocument/2006/relationships">
   <p:cSld>
+    <p:bg>
+      <p:bgPr>
+        <a:solidFill>
+          <a:srgbClr val="F1ECDD"/>
+        </a:solidFill>
+        <a:effectLst/>
+      </p:bgPr>
+    </p:bg>
     <p:spTree>
       <p:nvGrpSpPr>
         <p:cNvPr id="1" name=""/>
@@ -5274,7 +5322,7 @@
                 </a:solidFill>
                 <a:latin typeface="Calibri"/>
               </a:rPr>
-              <a:t>▸  </a:t>
+              <a:t>✓  </a:t>
             </a:r>
             <a:r>
               <a:rPr sz="1600" b="0">
@@ -5299,7 +5347,7 @@
                 </a:solidFill>
                 <a:latin typeface="Calibri"/>
               </a:rPr>
-              <a:t>▸  </a:t>
+              <a:t>✓  </a:t>
             </a:r>
             <a:r>
               <a:rPr sz="1600" b="0">
@@ -5324,7 +5372,7 @@
                 </a:solidFill>
                 <a:latin typeface="Calibri"/>
               </a:rPr>
-              <a:t>▸  </a:t>
+              <a:t>✓  </a:t>
             </a:r>
             <a:r>
               <a:rPr sz="1600" b="0">
@@ -5418,6 +5466,14 @@
 <file path=ppt/slides/slide7.xml><?xml version="1.0" encoding="utf-8"?>
 <p:sld xmlns:a="http://schemas.openxmlformats.org/drawingml/2006/main" xmlns:p="http://schemas.openxmlformats.org/presentationml/2006/main" xmlns:r="http://schemas.openxmlformats.org/officeDocument/2006/relationships">
   <p:cSld>
+    <p:bg>
+      <p:bgPr>
+        <a:solidFill>
+          <a:srgbClr val="F1ECDD"/>
+        </a:solidFill>
+        <a:effectLst/>
+      </p:bgPr>
+    </p:bg>
     <p:spTree>
       <p:nvGrpSpPr>
         <p:cNvPr id="1" name=""/>
@@ -5493,7 +5549,7 @@
                 </a:solidFill>
                 <a:latin typeface="Calibri"/>
               </a:rPr>
-              <a:t>▸  </a:t>
+              <a:t>✓  </a:t>
             </a:r>
             <a:r>
               <a:rPr sz="1600" b="0">
@@ -5518,7 +5574,7 @@
                 </a:solidFill>
                 <a:latin typeface="Calibri"/>
               </a:rPr>
-              <a:t>▸  </a:t>
+              <a:t>✓  </a:t>
             </a:r>
             <a:r>
               <a:rPr sz="1600" b="0">
@@ -5543,7 +5599,7 @@
                 </a:solidFill>
                 <a:latin typeface="Calibri"/>
               </a:rPr>
-              <a:t>▸  </a:t>
+              <a:t>✓  </a:t>
             </a:r>
             <a:r>
               <a:rPr sz="1600" b="0">
@@ -5637,6 +5693,14 @@
 <file path=ppt/slides/slide8.xml><?xml version="1.0" encoding="utf-8"?>
 <p:sld xmlns:a="http://schemas.openxmlformats.org/drawingml/2006/main" xmlns:p="http://schemas.openxmlformats.org/presentationml/2006/main" xmlns:r="http://schemas.openxmlformats.org/officeDocument/2006/relationships">
   <p:cSld>
+    <p:bg>
+      <p:bgPr>
+        <a:solidFill>
+          <a:srgbClr val="F1ECDD"/>
+        </a:solidFill>
+        <a:effectLst/>
+      </p:bgPr>
+    </p:bg>
     <p:spTree>
       <p:nvGrpSpPr>
         <p:cNvPr id="1" name=""/>
@@ -5712,7 +5776,7 @@
                 </a:solidFill>
                 <a:latin typeface="Calibri"/>
               </a:rPr>
-              <a:t>▸  </a:t>
+              <a:t>✓  </a:t>
             </a:r>
             <a:r>
               <a:rPr sz="1600" b="0">
@@ -5737,7 +5801,7 @@
                 </a:solidFill>
                 <a:latin typeface="Calibri"/>
               </a:rPr>
-              <a:t>▸  </a:t>
+              <a:t>✓  </a:t>
             </a:r>
             <a:r>
               <a:rPr sz="1600" b="0">
